--- a/docs/content/stage-5e/downloads/sjabloon-stage-presentatie.pptx
+++ b/docs/content/stage-5e/downloads/sjabloon-stage-presentatie.pptx
@@ -14,6 +14,7 @@
     <p:sldId id="261" r:id="rId9"/>
     <p:sldId id="262" r:id="rId10"/>
     <p:sldId id="263" r:id="rId11"/>
+    <p:sldId id="264" r:id="rId12"/>
   </p:sldIdLst>
   <p:sldSz cx="8783638" cy="6858000"/>
   <p:notesSz cx="7559675" cy="10691813"/>
@@ -26,14 +27,21 @@
     </p:embeddedFont>
     <p:embeddedFont>
       <p:font typeface="Poppins"/>
-      <p:regular r:id="rId12"/>
-      <p:bold r:id="rId13"/>
-      <p:italic r:id="rId14"/>
-      <p:boldItalic r:id="rId15"/>
+      <p:regular r:id="rId13"/>
+      <p:bold r:id="rId14"/>
+      <p:italic r:id="rId15"/>
+      <p:boldItalic r:id="rId16"/>
+    </p:embeddedFont>
+    <p:embeddedFont>
+      <p:font typeface="DejaVu Sans"/>
+      <p:regular r:id="rId17"/>
+      <p:bold r:id="rId18"/>
+      <p:italic r:id="rId19"/>
+      <p:boldItalic r:id="rId20"/>
     </p:embeddedFont>
     <p:embeddedFont>
       <p:font typeface="Lucida Sans"/>
-      <p:regular r:id="rId16"/>
+      <p:regular r:id="rId21"/>
     </p:embeddedFont>
   </p:embeddedFontLst>
 </p:presentation>
@@ -68,8 +76,8 @@
         </p:nvSpPr>
         <p:spPr>
           <a:xfrm>
-            <a:off x="1154880" y="365040"/>
-            <a:ext cx="6785280" cy="443160"/>
+            <a:off x="438840" y="273600"/>
+            <a:ext cx="7904880" cy="1144800"/>
           </a:xfrm>
           <a:prstGeom prst="rect">
             <a:avLst/>
@@ -84,10 +92,10 @@
             <a:spAutoFit/>
           </a:bodyPr>
           <a:p>
-            <a:pPr indent="0" algn="l">
+            <a:pPr indent="0" algn="ctr">
               <a:buNone/>
             </a:pPr>
-            <a:endParaRPr lang="nl-BE" sz="1400" b="0" u="none" strike="noStrike">
+            <a:endParaRPr lang="nl-BE" sz="4400" b="0" u="none" strike="noStrike">
               <a:solidFill>
                 <a:srgbClr val="000000"/>
               </a:solidFill>
@@ -110,8 +118,8 @@
         </p:nvSpPr>
         <p:spPr>
           <a:xfrm>
-            <a:off x="1154880" y="1193400"/>
-            <a:ext cx="6785280" cy="4983120"/>
+            <a:off x="438840" y="1604520"/>
+            <a:ext cx="7904880" cy="3977280"/>
           </a:xfrm>
           <a:prstGeom prst="rect">
             <a:avLst/>
@@ -162,6 +170,112 @@
           <a:chExt cx="0" cy="0"/>
         </a:xfrm>
       </p:grpSpPr>
+    </p:spTree>
+  </p:cSld>
+</p:sldLayout>
+</file>
+
+<file path=ppt/slideLayouts/slideLayout3.xml><?xml version="1.0" encoding="utf-8"?>
+<p:sldLayout xmlns:a="http://schemas.openxmlformats.org/drawingml/2006/main" xmlns:p="http://schemas.openxmlformats.org/presentationml/2006/main" xmlns:r="http://schemas.openxmlformats.org/officeDocument/2006/relationships" xmlns:p14="http://schemas.microsoft.com/office/powerpoint/2010/main" xmlns:p15="http://schemas.microsoft.com/office/powerpoint/2012/main" xmlns:mc="http://schemas.openxmlformats.org/markup-compatibility/2006" type="title" preserve="1">
+  <p:cSld name="Titel en object">
+    <p:spTree>
+      <p:nvGrpSpPr>
+        <p:cNvPr id="1" name=""/>
+        <p:cNvGrpSpPr/>
+        <p:nvPr/>
+      </p:nvGrpSpPr>
+      <p:grpSpPr>
+        <a:xfrm>
+          <a:off x="0" y="0"/>
+          <a:ext cx="0" cy="0"/>
+          <a:chOff x="0" y="0"/>
+          <a:chExt cx="0" cy="0"/>
+        </a:xfrm>
+      </p:grpSpPr>
+      <p:sp>
+        <p:nvSpPr>
+          <p:cNvPr id="20" name="PlaceHolder 1"/>
+          <p:cNvSpPr>
+            <a:spLocks noGrp="1"/>
+          </p:cNvSpPr>
+          <p:nvPr>
+            <p:ph type="title"/>
+          </p:nvPr>
+        </p:nvSpPr>
+        <p:spPr>
+          <a:xfrm>
+            <a:off x="438840" y="273600"/>
+            <a:ext cx="7904880" cy="1144800"/>
+          </a:xfrm>
+          <a:prstGeom prst="rect">
+            <a:avLst/>
+          </a:prstGeom>
+          <a:noFill/>
+          <a:ln w="0">
+            <a:noFill/>
+          </a:ln>
+        </p:spPr>
+        <p:txBody>
+          <a:bodyPr lIns="0" tIns="0" rIns="0" bIns="0" anchor="ctr">
+            <a:spAutoFit/>
+          </a:bodyPr>
+          <a:p>
+            <a:pPr indent="0" algn="ctr">
+              <a:buNone/>
+            </a:pPr>
+            <a:endParaRPr lang="nl-BE" sz="4400" b="0" u="none" strike="noStrike">
+              <a:solidFill>
+                <a:srgbClr val="000000"/>
+              </a:solidFill>
+              <a:effectLst/>
+              <a:uFillTx/>
+              <a:latin typeface="Arial"/>
+            </a:endParaRPr>
+          </a:p>
+        </p:txBody>
+      </p:sp>
+      <p:sp>
+        <p:nvSpPr>
+          <p:cNvPr id="21" name="PlaceHolder 2"/>
+          <p:cNvSpPr>
+            <a:spLocks noGrp="1"/>
+          </p:cNvSpPr>
+          <p:nvPr>
+            <p:ph type="subTitle"/>
+          </p:nvPr>
+        </p:nvSpPr>
+        <p:spPr>
+          <a:xfrm>
+            <a:off x="438840" y="1604520"/>
+            <a:ext cx="7904880" cy="3977280"/>
+          </a:xfrm>
+          <a:prstGeom prst="rect">
+            <a:avLst/>
+          </a:prstGeom>
+          <a:noFill/>
+          <a:ln w="0">
+            <a:noFill/>
+          </a:ln>
+        </p:spPr>
+        <p:txBody>
+          <a:bodyPr lIns="0" tIns="0" rIns="0" bIns="0" anchor="ctr">
+            <a:spAutoFit/>
+          </a:bodyPr>
+          <a:p>
+            <a:pPr indent="0" algn="ctr">
+              <a:buNone/>
+            </a:pPr>
+            <a:endParaRPr lang="nl-BE" sz="3200" b="0" u="none" strike="noStrike">
+              <a:solidFill>
+                <a:srgbClr val="000000"/>
+              </a:solidFill>
+              <a:effectLst/>
+              <a:uFillTx/>
+              <a:latin typeface="Arial"/>
+            </a:endParaRPr>
+          </a:p>
+        </p:txBody>
+      </p:sp>
     </p:spTree>
   </p:cSld>
 </p:sldLayout>
@@ -205,7 +319,7 @@
         <p:spPr>
           <a:xfrm>
             <a:off x="3960" y="0"/>
-            <a:ext cx="8775360" cy="6857640"/>
+            <a:ext cx="8775000" cy="6857280"/>
           </a:xfrm>
           <a:prstGeom prst="rect">
             <a:avLst/>
@@ -225,7 +339,7 @@
         <p:spPr>
           <a:xfrm>
             <a:off x="437400" y="149040"/>
-            <a:ext cx="4941000" cy="774720"/>
+            <a:ext cx="4940640" cy="774360"/>
           </a:xfrm>
           <a:prstGeom prst="rect">
             <a:avLst/>
@@ -244,7 +358,7 @@
           <a:fontRef idx="minor"/>
         </p:style>
         <p:txBody>
-          <a:bodyPr anchor="ctr">
+          <a:bodyPr lIns="90000" tIns="45000" rIns="90000" bIns="45000" anchor="ctr">
             <a:noAutofit/>
           </a:bodyPr>
           <a:p>
@@ -272,7 +386,55 @@
         <p:spPr>
           <a:xfrm>
             <a:off x="347760" y="0"/>
-            <a:ext cx="3056400" cy="1079640"/>
+            <a:ext cx="3056040" cy="1079280"/>
+          </a:xfrm>
+          <a:prstGeom prst="rect">
+            <a:avLst/>
+          </a:prstGeom>
+          <a:noFill/>
+          <a:ln w="0">
+            <a:noFill/>
+          </a:ln>
+        </p:spPr>
+      </p:pic>
+      <p:pic>
+        <p:nvPicPr>
+          <p:cNvPr id="5" name="Google Shape;16;p4"/>
+          <p:cNvPicPr/>
+          <p:nvPr/>
+        </p:nvPicPr>
+        <p:blipFill>
+          <a:blip r:embed="rId5"/>
+          <a:stretch/>
+        </p:blipFill>
+        <p:spPr>
+          <a:xfrm>
+            <a:off x="3960" y="0"/>
+            <a:ext cx="8775000" cy="6857280"/>
+          </a:xfrm>
+          <a:prstGeom prst="rect">
+            <a:avLst/>
+          </a:prstGeom>
+          <a:noFill/>
+          <a:ln w="0">
+            <a:noFill/>
+          </a:ln>
+        </p:spPr>
+      </p:pic>
+      <p:pic>
+        <p:nvPicPr>
+          <p:cNvPr id="6" name="Google Shape;17;p4"/>
+          <p:cNvPicPr/>
+          <p:nvPr/>
+        </p:nvPicPr>
+        <p:blipFill>
+          <a:blip r:embed="rId6"/>
+          <a:stretch/>
+        </p:blipFill>
+        <p:spPr>
+          <a:xfrm>
+            <a:off x="3960" y="0"/>
+            <a:ext cx="8775000" cy="6857280"/>
           </a:xfrm>
           <a:prstGeom prst="rect">
             <a:avLst/>
@@ -285,7 +447,74 @@
       </p:pic>
       <p:sp>
         <p:nvSpPr>
-          <p:cNvPr id="5" name="PlaceHolder 1"/>
+          <p:cNvPr id="7" name="Google Shape;18;p4"/>
+          <p:cNvSpPr/>
+          <p:nvPr/>
+        </p:nvSpPr>
+        <p:spPr>
+          <a:xfrm>
+            <a:off x="437400" y="149040"/>
+            <a:ext cx="4940640" cy="774360"/>
+          </a:xfrm>
+          <a:prstGeom prst="rect">
+            <a:avLst/>
+          </a:prstGeom>
+          <a:solidFill>
+            <a:srgbClr val="86BC25"/>
+          </a:solidFill>
+          <a:ln w="0">
+            <a:noFill/>
+          </a:ln>
+        </p:spPr>
+        <p:style>
+          <a:lnRef idx="0"/>
+          <a:fillRef idx="0"/>
+          <a:effectRef idx="0"/>
+          <a:fontRef idx="minor"/>
+        </p:style>
+        <p:txBody>
+          <a:bodyPr lIns="90000" tIns="45000" rIns="90000" bIns="45000" anchor="ctr">
+            <a:noAutofit/>
+          </a:bodyPr>
+          <a:p>
+            <a:endParaRPr lang="nl-BE" sz="1400" b="0" u="none" strike="noStrike">
+              <a:solidFill>
+                <a:srgbClr val="000000"/>
+              </a:solidFill>
+              <a:effectLst/>
+              <a:uFillTx/>
+              <a:latin typeface="Arial"/>
+            </a:endParaRPr>
+          </a:p>
+        </p:txBody>
+      </p:sp>
+      <p:pic>
+        <p:nvPicPr>
+          <p:cNvPr id="8" name="Google Shape;19;p4"/>
+          <p:cNvPicPr/>
+          <p:nvPr/>
+        </p:nvPicPr>
+        <p:blipFill>
+          <a:blip r:embed="rId7"/>
+          <a:stretch/>
+        </p:blipFill>
+        <p:spPr>
+          <a:xfrm>
+            <a:off x="347760" y="0"/>
+            <a:ext cx="3056040" cy="1079280"/>
+          </a:xfrm>
+          <a:prstGeom prst="rect">
+            <a:avLst/>
+          </a:prstGeom>
+          <a:noFill/>
+          <a:ln w="0">
+            <a:noFill/>
+          </a:ln>
+        </p:spPr>
+      </p:pic>
+      <p:sp>
+        <p:nvSpPr>
+          <p:cNvPr id="9" name="PlaceHolder 1"/>
           <p:cNvSpPr>
             <a:spLocks noGrp="1"/>
           </p:cNvSpPr>
@@ -295,8 +524,8 @@
         </p:nvSpPr>
         <p:spPr>
           <a:xfrm>
-            <a:off x="430200" y="1999080"/>
-            <a:ext cx="6815520" cy="754200"/>
+            <a:off x="1154880" y="479520"/>
+            <a:ext cx="6784920" cy="213840"/>
           </a:xfrm>
           <a:prstGeom prst="rect">
             <a:avLst/>
@@ -308,7 +537,7 @@
         </p:spPr>
         <p:txBody>
           <a:bodyPr lIns="0" tIns="0" rIns="0" bIns="0" anchor="ctr">
-            <a:noAutofit/>
+            <a:spAutoFit/>
           </a:bodyPr>
           <a:lstStyle>
             <a:lvl1pPr indent="0" algn="l">
@@ -349,121 +578,6 @@
           </a:p>
         </p:txBody>
       </p:sp>
-      <p:pic>
-        <p:nvPicPr>
-          <p:cNvPr id="6" name="Google Shape;16;p4"/>
-          <p:cNvPicPr/>
-          <p:nvPr/>
-        </p:nvPicPr>
-        <p:blipFill>
-          <a:blip r:embed="rId5"/>
-          <a:stretch/>
-        </p:blipFill>
-        <p:spPr>
-          <a:xfrm>
-            <a:off x="3960" y="0"/>
-            <a:ext cx="8775360" cy="6857640"/>
-          </a:xfrm>
-          <a:prstGeom prst="rect">
-            <a:avLst/>
-          </a:prstGeom>
-          <a:noFill/>
-          <a:ln w="0">
-            <a:noFill/>
-          </a:ln>
-        </p:spPr>
-      </p:pic>
-      <p:pic>
-        <p:nvPicPr>
-          <p:cNvPr id="7" name="Google Shape;17;p4"/>
-          <p:cNvPicPr/>
-          <p:nvPr/>
-        </p:nvPicPr>
-        <p:blipFill>
-          <a:blip r:embed="rId6"/>
-          <a:stretch/>
-        </p:blipFill>
-        <p:spPr>
-          <a:xfrm>
-            <a:off x="3960" y="0"/>
-            <a:ext cx="8775360" cy="6857640"/>
-          </a:xfrm>
-          <a:prstGeom prst="rect">
-            <a:avLst/>
-          </a:prstGeom>
-          <a:noFill/>
-          <a:ln w="0">
-            <a:noFill/>
-          </a:ln>
-        </p:spPr>
-      </p:pic>
-      <p:sp>
-        <p:nvSpPr>
-          <p:cNvPr id="8" name="Google Shape;18;p4"/>
-          <p:cNvSpPr/>
-          <p:nvPr/>
-        </p:nvSpPr>
-        <p:spPr>
-          <a:xfrm>
-            <a:off x="437400" y="149040"/>
-            <a:ext cx="4941000" cy="774720"/>
-          </a:xfrm>
-          <a:prstGeom prst="rect">
-            <a:avLst/>
-          </a:prstGeom>
-          <a:solidFill>
-            <a:srgbClr val="86BC25"/>
-          </a:solidFill>
-          <a:ln w="0">
-            <a:noFill/>
-          </a:ln>
-        </p:spPr>
-        <p:style>
-          <a:lnRef idx="0"/>
-          <a:fillRef idx="0"/>
-          <a:effectRef idx="0"/>
-          <a:fontRef idx="minor"/>
-        </p:style>
-        <p:txBody>
-          <a:bodyPr anchor="ctr">
-            <a:noAutofit/>
-          </a:bodyPr>
-          <a:p>
-            <a:endParaRPr lang="nl-BE" sz="1400" b="0" u="none" strike="noStrike">
-              <a:solidFill>
-                <a:srgbClr val="000000"/>
-              </a:solidFill>
-              <a:effectLst/>
-              <a:uFillTx/>
-              <a:latin typeface="Arial"/>
-            </a:endParaRPr>
-          </a:p>
-        </p:txBody>
-      </p:sp>
-      <p:pic>
-        <p:nvPicPr>
-          <p:cNvPr id="9" name="Google Shape;19;p4"/>
-          <p:cNvPicPr/>
-          <p:nvPr/>
-        </p:nvPicPr>
-        <p:blipFill>
-          <a:blip r:embed="rId7"/>
-          <a:stretch/>
-        </p:blipFill>
-        <p:spPr>
-          <a:xfrm>
-            <a:off x="347760" y="0"/>
-            <a:ext cx="3056400" cy="1079640"/>
-          </a:xfrm>
-          <a:prstGeom prst="rect">
-            <a:avLst/>
-          </a:prstGeom>
-          <a:noFill/>
-          <a:ln w="0">
-            <a:noFill/>
-          </a:ln>
-        </p:spPr>
-      </p:pic>
       <p:sp>
         <p:nvSpPr>
           <p:cNvPr id="10" name="PlaceHolder 2"/>
@@ -502,7 +616,7 @@
               <a:buSzPct val="45000"/>
               <a:buFont typeface="Wingdings" charset="2"/>
               <a:buChar char=""/>
-              <a:defRPr lang="nl-BE" sz="1400" b="0" u="none" strike="noStrike">
+              <a:defRPr lang="nl-BE" sz="3200" b="0" u="none" strike="noStrike">
                 <a:solidFill>
                   <a:srgbClr val="000000"/>
                 </a:solidFill>
@@ -521,7 +635,7 @@
               <a:buSzPct val="75000"/>
               <a:buFont typeface="Symbol" charset="2"/>
               <a:buChar char=""/>
-              <a:defRPr lang="nl-BE" sz="1400" b="0" u="none" strike="noStrike">
+              <a:defRPr lang="nl-BE" sz="2800" b="0" u="none" strike="noStrike">
                 <a:solidFill>
                   <a:srgbClr val="000000"/>
                 </a:solidFill>
@@ -540,7 +654,7 @@
               <a:buSzPct val="45000"/>
               <a:buFont typeface="Wingdings" charset="2"/>
               <a:buChar char=""/>
-              <a:defRPr lang="nl-BE" sz="1400" b="0" u="none" strike="noStrike">
+              <a:defRPr lang="nl-BE" sz="2400" b="0" u="none" strike="noStrike">
                 <a:solidFill>
                   <a:srgbClr val="000000"/>
                 </a:solidFill>
@@ -559,7 +673,7 @@
               <a:buSzPct val="75000"/>
               <a:buFont typeface="Symbol" charset="2"/>
               <a:buChar char=""/>
-              <a:defRPr lang="nl-BE" sz="1400" b="0" u="none" strike="noStrike">
+              <a:defRPr lang="nl-BE" sz="2000" b="0" u="none" strike="noStrike">
                 <a:solidFill>
                   <a:srgbClr val="000000"/>
                 </a:solidFill>
@@ -639,7 +753,7 @@
               <a:buChar char=""/>
             </a:pPr>
             <a:r>
-              <a:rPr lang="nl-BE" sz="1400" b="0" u="none" strike="noStrike">
+              <a:rPr lang="nl-BE" sz="3200" b="0" u="none" strike="noStrike">
                 <a:solidFill>
                   <a:srgbClr val="000000"/>
                 </a:solidFill>
@@ -649,7 +763,7 @@
               </a:rPr>
               <a:t>Klik om de opmaak van de overzichtstekst te bewerken</a:t>
             </a:r>
-            <a:endParaRPr lang="nl-BE" sz="1400" b="0" u="none" strike="noStrike">
+            <a:endParaRPr lang="nl-BE" sz="3200" b="0" u="none" strike="noStrike">
               <a:solidFill>
                 <a:srgbClr val="000000"/>
               </a:solidFill>
@@ -671,7 +785,7 @@
               <a:buChar char=""/>
             </a:pPr>
             <a:r>
-              <a:rPr lang="nl-BE" sz="1400" b="0" u="none" strike="noStrike">
+              <a:rPr lang="nl-BE" sz="2800" b="0" u="none" strike="noStrike">
                 <a:solidFill>
                   <a:srgbClr val="000000"/>
                 </a:solidFill>
@@ -681,7 +795,7 @@
               </a:rPr>
               <a:t>Tweede overzichtsniveau</a:t>
             </a:r>
-            <a:endParaRPr lang="nl-BE" sz="1400" b="0" u="none" strike="noStrike">
+            <a:endParaRPr lang="nl-BE" sz="2800" b="0" u="none" strike="noStrike">
               <a:solidFill>
                 <a:srgbClr val="000000"/>
               </a:solidFill>
@@ -703,7 +817,7 @@
               <a:buChar char=""/>
             </a:pPr>
             <a:r>
-              <a:rPr lang="nl-BE" sz="1400" b="0" u="none" strike="noStrike">
+              <a:rPr lang="nl-BE" sz="2400" b="0" u="none" strike="noStrike">
                 <a:solidFill>
                   <a:srgbClr val="000000"/>
                 </a:solidFill>
@@ -713,7 +827,7 @@
               </a:rPr>
               <a:t>Derde overzichtsniveau</a:t>
             </a:r>
-            <a:endParaRPr lang="nl-BE" sz="1400" b="0" u="none" strike="noStrike">
+            <a:endParaRPr lang="nl-BE" sz="2400" b="0" u="none" strike="noStrike">
               <a:solidFill>
                 <a:srgbClr val="000000"/>
               </a:solidFill>
@@ -735,7 +849,7 @@
               <a:buChar char=""/>
             </a:pPr>
             <a:r>
-              <a:rPr lang="nl-BE" sz="1400" b="0" u="none" strike="noStrike">
+              <a:rPr lang="nl-BE" sz="2000" b="0" u="none" strike="noStrike">
                 <a:solidFill>
                   <a:srgbClr val="000000"/>
                 </a:solidFill>
@@ -745,7 +859,7 @@
               </a:rPr>
               <a:t>Vierde overzichtsniveau</a:t>
             </a:r>
-            <a:endParaRPr lang="nl-BE" sz="1400" b="0" u="none" strike="noStrike">
+            <a:endParaRPr lang="nl-BE" sz="2000" b="0" u="none" strike="noStrike">
               <a:solidFill>
                 <a:srgbClr val="000000"/>
               </a:solidFill>
@@ -899,7 +1013,7 @@
         <p:spPr>
           <a:xfrm>
             <a:off x="3960" y="0"/>
-            <a:ext cx="8775360" cy="6857640"/>
+            <a:ext cx="8775000" cy="6857280"/>
           </a:xfrm>
           <a:prstGeom prst="rect">
             <a:avLst/>
@@ -919,7 +1033,7 @@
         <p:spPr>
           <a:xfrm>
             <a:off x="437400" y="149040"/>
-            <a:ext cx="4941000" cy="774720"/>
+            <a:ext cx="4940640" cy="774360"/>
           </a:xfrm>
           <a:prstGeom prst="rect">
             <a:avLst/>
@@ -938,7 +1052,7 @@
           <a:fontRef idx="minor"/>
         </p:style>
         <p:txBody>
-          <a:bodyPr anchor="ctr">
+          <a:bodyPr lIns="90000" tIns="45000" rIns="90000" bIns="45000" anchor="ctr">
             <a:noAutofit/>
           </a:bodyPr>
           <a:p>
@@ -966,7 +1080,31 @@
         <p:spPr>
           <a:xfrm>
             <a:off x="347760" y="0"/>
-            <a:ext cx="3056400" cy="1079640"/>
+            <a:ext cx="3056040" cy="1079280"/>
+          </a:xfrm>
+          <a:prstGeom prst="rect">
+            <a:avLst/>
+          </a:prstGeom>
+          <a:noFill/>
+          <a:ln w="0">
+            <a:noFill/>
+          </a:ln>
+        </p:spPr>
+      </p:pic>
+      <p:pic>
+        <p:nvPicPr>
+          <p:cNvPr id="16" name="Google Shape;23;p5"/>
+          <p:cNvPicPr/>
+          <p:nvPr/>
+        </p:nvPicPr>
+        <p:blipFill>
+          <a:blip r:embed="rId5"/>
+          <a:stretch/>
+        </p:blipFill>
+        <p:spPr>
+          <a:xfrm>
+            <a:off x="0" y="-2160"/>
+            <a:ext cx="8775000" cy="6857280"/>
           </a:xfrm>
           <a:prstGeom prst="rect">
             <a:avLst/>
@@ -979,7 +1117,50 @@
       </p:pic>
       <p:sp>
         <p:nvSpPr>
-          <p:cNvPr id="16" name="PlaceHolder 1"/>
+          <p:cNvPr id="17" name="Google Shape;24;p5"/>
+          <p:cNvSpPr/>
+          <p:nvPr/>
+        </p:nvSpPr>
+        <p:spPr>
+          <a:xfrm>
+            <a:off x="7660440" y="4650840"/>
+            <a:ext cx="269280" cy="2231280"/>
+          </a:xfrm>
+          <a:prstGeom prst="rect">
+            <a:avLst/>
+          </a:prstGeom>
+          <a:solidFill>
+            <a:srgbClr val="E63323"/>
+          </a:solidFill>
+          <a:ln w="0">
+            <a:noFill/>
+          </a:ln>
+        </p:spPr>
+        <p:style>
+          <a:lnRef idx="0"/>
+          <a:fillRef idx="0"/>
+          <a:effectRef idx="0"/>
+          <a:fontRef idx="minor"/>
+        </p:style>
+        <p:txBody>
+          <a:bodyPr lIns="90000" tIns="45000" rIns="90000" bIns="45000" anchor="ctr">
+            <a:noAutofit/>
+          </a:bodyPr>
+          <a:p>
+            <a:endParaRPr lang="nl-BE" sz="1400" b="0" u="none" strike="noStrike">
+              <a:solidFill>
+                <a:srgbClr val="FFFFFF"/>
+              </a:solidFill>
+              <a:effectLst/>
+              <a:uFillTx/>
+              <a:latin typeface="Arial"/>
+            </a:endParaRPr>
+          </a:p>
+        </p:txBody>
+      </p:sp>
+      <p:sp>
+        <p:nvSpPr>
+          <p:cNvPr id="18" name="PlaceHolder 1"/>
           <p:cNvSpPr>
             <a:spLocks noGrp="1"/>
           </p:cNvSpPr>
@@ -989,8 +1170,8 @@
         </p:nvSpPr>
         <p:spPr>
           <a:xfrm>
-            <a:off x="1154880" y="365040"/>
-            <a:ext cx="6785280" cy="443160"/>
+            <a:off x="438840" y="273600"/>
+            <a:ext cx="7904880" cy="1144800"/>
           </a:xfrm>
           <a:prstGeom prst="rect">
             <a:avLst/>
@@ -1005,9 +1186,9 @@
             <a:noAutofit/>
           </a:bodyPr>
           <a:lstStyle>
-            <a:lvl1pPr indent="0" algn="l">
+            <a:lvl1pPr indent="0" algn="ctr">
               <a:buNone/>
-              <a:defRPr lang="nl-BE" sz="1400" b="0" u="none" strike="noStrike">
+              <a:defRPr lang="nl-BE" sz="4400" b="0" u="none" strike="noStrike">
                 <a:solidFill>
                   <a:srgbClr val="000000"/>
                 </a:solidFill>
@@ -1018,11 +1199,11 @@
             </a:lvl1pPr>
           </a:lstStyle>
           <a:p>
-            <a:pPr indent="0" algn="l">
+            <a:pPr indent="0" algn="ctr">
               <a:buNone/>
             </a:pPr>
             <a:r>
-              <a:rPr lang="nl-BE" sz="1400" b="0" u="none" strike="noStrike">
+              <a:rPr lang="nl-BE" sz="4400" b="0" u="none" strike="noStrike">
                 <a:solidFill>
                   <a:srgbClr val="000000"/>
                 </a:solidFill>
@@ -1032,7 +1213,7 @@
               </a:rPr>
               <a:t>Klik om de opmaak van de titeltekst te bewerken</a:t>
             </a:r>
-            <a:endParaRPr lang="nl-BE" sz="1400" b="0" u="none" strike="noStrike">
+            <a:endParaRPr lang="nl-BE" sz="4400" b="0" u="none" strike="noStrike">
               <a:solidFill>
                 <a:srgbClr val="000000"/>
               </a:solidFill>
@@ -1045,7 +1226,7 @@
       </p:sp>
       <p:sp>
         <p:nvSpPr>
-          <p:cNvPr id="17" name="PlaceHolder 2"/>
+          <p:cNvPr id="19" name="PlaceHolder 2"/>
           <p:cNvSpPr>
             <a:spLocks noGrp="1"/>
           </p:cNvSpPr>
@@ -1055,8 +1236,8 @@
         </p:nvSpPr>
         <p:spPr>
           <a:xfrm>
-            <a:off x="1154880" y="1193400"/>
-            <a:ext cx="6785280" cy="4983120"/>
+            <a:off x="438840" y="1604520"/>
+            <a:ext cx="7904880" cy="3977280"/>
           </a:xfrm>
           <a:prstGeom prst="rect">
             <a:avLst/>
@@ -1067,7 +1248,7 @@
           </a:ln>
         </p:spPr>
         <p:txBody>
-          <a:bodyPr lIns="91440" tIns="45720" rIns="91440" bIns="45720" anchor="t">
+          <a:bodyPr lIns="0" tIns="0" rIns="0" bIns="0" anchor="t">
             <a:normAutofit/>
           </a:bodyPr>
           <a:lstStyle>
@@ -1081,7 +1262,7 @@
               <a:buSzPct val="45000"/>
               <a:buFont typeface="Wingdings" charset="2"/>
               <a:buChar char=""/>
-              <a:defRPr lang="nl-BE" sz="2000" b="0" u="none" strike="noStrike">
+              <a:defRPr lang="nl-BE" sz="3200" b="0" u="none" strike="noStrike">
                 <a:solidFill>
                   <a:srgbClr val="000000"/>
                 </a:solidFill>
@@ -1100,7 +1281,7 @@
               <a:buSzPct val="75000"/>
               <a:buFont typeface="Symbol" charset="2"/>
               <a:buChar char=""/>
-              <a:defRPr lang="nl-BE" sz="2000" b="0" u="none" strike="noStrike">
+              <a:defRPr lang="nl-BE" sz="2800" b="0" u="none" strike="noStrike">
                 <a:solidFill>
                   <a:srgbClr val="000000"/>
                 </a:solidFill>
@@ -1119,7 +1300,7 @@
               <a:buSzPct val="45000"/>
               <a:buFont typeface="Wingdings" charset="2"/>
               <a:buChar char=""/>
-              <a:defRPr lang="nl-BE" sz="2000" b="0" u="none" strike="noStrike">
+              <a:defRPr lang="nl-BE" sz="2400" b="0" u="none" strike="noStrike">
                 <a:solidFill>
                   <a:srgbClr val="000000"/>
                 </a:solidFill>
@@ -1218,7 +1399,7 @@
               <a:buChar char=""/>
             </a:pPr>
             <a:r>
-              <a:rPr lang="nl-BE" sz="2000" b="0" u="none" strike="noStrike">
+              <a:rPr lang="nl-BE" sz="3200" b="0" u="none" strike="noStrike">
                 <a:solidFill>
                   <a:srgbClr val="000000"/>
                 </a:solidFill>
@@ -1228,7 +1409,7 @@
               </a:rPr>
               <a:t>Klik om de opmaak van de overzichtstekst te bewerken</a:t>
             </a:r>
-            <a:endParaRPr lang="nl-BE" sz="2000" b="0" u="none" strike="noStrike">
+            <a:endParaRPr lang="nl-BE" sz="3200" b="0" u="none" strike="noStrike">
               <a:solidFill>
                 <a:srgbClr val="000000"/>
               </a:solidFill>
@@ -1250,7 +1431,7 @@
               <a:buChar char=""/>
             </a:pPr>
             <a:r>
-              <a:rPr lang="nl-BE" sz="2000" b="0" u="none" strike="noStrike">
+              <a:rPr lang="nl-BE" sz="2800" b="0" u="none" strike="noStrike">
                 <a:solidFill>
                   <a:srgbClr val="000000"/>
                 </a:solidFill>
@@ -1260,7 +1441,7 @@
               </a:rPr>
               <a:t>Tweede overzichtsniveau</a:t>
             </a:r>
-            <a:endParaRPr lang="nl-BE" sz="2000" b="0" u="none" strike="noStrike">
+            <a:endParaRPr lang="nl-BE" sz="2800" b="0" u="none" strike="noStrike">
               <a:solidFill>
                 <a:srgbClr val="000000"/>
               </a:solidFill>
@@ -1282,7 +1463,7 @@
               <a:buChar char=""/>
             </a:pPr>
             <a:r>
-              <a:rPr lang="nl-BE" sz="2000" b="0" u="none" strike="noStrike">
+              <a:rPr lang="nl-BE" sz="2400" b="0" u="none" strike="noStrike">
                 <a:solidFill>
                   <a:srgbClr val="000000"/>
                 </a:solidFill>
@@ -1292,7 +1473,7 @@
               </a:rPr>
               <a:t>Derde overzichtsniveau</a:t>
             </a:r>
-            <a:endParaRPr lang="nl-BE" sz="2000" b="0" u="none" strike="noStrike">
+            <a:endParaRPr lang="nl-BE" sz="2400" b="0" u="none" strike="noStrike">
               <a:solidFill>
                 <a:srgbClr val="000000"/>
               </a:solidFill>
@@ -1423,73 +1604,6 @@
             <a:endParaRPr lang="nl-BE" sz="2000" b="0" u="none" strike="noStrike">
               <a:solidFill>
                 <a:srgbClr val="000000"/>
-              </a:solidFill>
-              <a:effectLst/>
-              <a:uFillTx/>
-              <a:latin typeface="Arial"/>
-            </a:endParaRPr>
-          </a:p>
-        </p:txBody>
-      </p:sp>
-      <p:pic>
-        <p:nvPicPr>
-          <p:cNvPr id="18" name="Google Shape;23;p5"/>
-          <p:cNvPicPr/>
-          <p:nvPr/>
-        </p:nvPicPr>
-        <p:blipFill>
-          <a:blip r:embed="rId5"/>
-          <a:stretch/>
-        </p:blipFill>
-        <p:spPr>
-          <a:xfrm>
-            <a:off x="0" y="-2160"/>
-            <a:ext cx="8775360" cy="6857640"/>
-          </a:xfrm>
-          <a:prstGeom prst="rect">
-            <a:avLst/>
-          </a:prstGeom>
-          <a:noFill/>
-          <a:ln w="0">
-            <a:noFill/>
-          </a:ln>
-        </p:spPr>
-      </p:pic>
-      <p:sp>
-        <p:nvSpPr>
-          <p:cNvPr id="19" name="Google Shape;24;p5"/>
-          <p:cNvSpPr/>
-          <p:nvPr/>
-        </p:nvSpPr>
-        <p:spPr>
-          <a:xfrm>
-            <a:off x="7660440" y="4650840"/>
-            <a:ext cx="269640" cy="2231640"/>
-          </a:xfrm>
-          <a:prstGeom prst="rect">
-            <a:avLst/>
-          </a:prstGeom>
-          <a:solidFill>
-            <a:srgbClr val="E63323"/>
-          </a:solidFill>
-          <a:ln w="0">
-            <a:noFill/>
-          </a:ln>
-        </p:spPr>
-        <p:style>
-          <a:lnRef idx="0"/>
-          <a:fillRef idx="0"/>
-          <a:effectRef idx="0"/>
-          <a:fontRef idx="minor"/>
-        </p:style>
-        <p:txBody>
-          <a:bodyPr anchor="ctr">
-            <a:noAutofit/>
-          </a:bodyPr>
-          <a:p>
-            <a:endParaRPr lang="nl-BE" sz="1400" b="0" u="none" strike="noStrike">
-              <a:solidFill>
-                <a:srgbClr val="FFFFFF"/>
               </a:solidFill>
               <a:effectLst/>
               <a:uFillTx/>
@@ -1503,6 +1617,7 @@
   <p:clrMap bg1="lt1" tx1="dk1" bg2="lt2" tx2="dk2" accent1="accent1" accent2="accent2" accent3="accent3" accent4="accent4" accent5="accent5" accent6="accent6" hlink="hlink" folHlink="folHlink"/>
   <p:sldLayoutIdLst>
     <p:sldLayoutId id="2147483651" r:id="rId6"/>
+    <p:sldLayoutId id="2147483652" r:id="rId7"/>
   </p:sldLayoutIdLst>
 </p:sldMaster>
 </file>
@@ -1526,7 +1641,7 @@
       </p:grpSpPr>
       <p:sp>
         <p:nvSpPr>
-          <p:cNvPr id="20" name="PlaceHolder 1"/>
+          <p:cNvPr id="22" name="PlaceHolder 1"/>
           <p:cNvSpPr>
             <a:spLocks noGrp="1"/>
           </p:cNvSpPr>
@@ -1537,7 +1652,7 @@
         <p:spPr>
           <a:xfrm>
             <a:off x="430200" y="1999080"/>
-            <a:ext cx="6815520" cy="754200"/>
+            <a:ext cx="6815160" cy="753840"/>
           </a:xfrm>
           <a:prstGeom prst="rect">
             <a:avLst/>
@@ -1586,7 +1701,7 @@
       </p:sp>
       <p:sp>
         <p:nvSpPr>
-          <p:cNvPr id="21" name="PlaceHolder 2"/>
+          <p:cNvPr id="23" name="PlaceHolder 2"/>
           <p:cNvSpPr>
             <a:spLocks noGrp="1"/>
           </p:cNvSpPr>
@@ -1597,7 +1712,7 @@
         <p:spPr>
           <a:xfrm>
             <a:off x="430200" y="2753640"/>
-            <a:ext cx="6587280" cy="1655280"/>
+            <a:ext cx="6586920" cy="1654920"/>
           </a:xfrm>
           <a:prstGeom prst="rect">
             <a:avLst/>
@@ -1616,6 +1731,9 @@
               <a:lnSpc>
                 <a:spcPct val="90000"/>
               </a:lnSpc>
+              <a:spcBef>
+                <a:spcPts val="1417"/>
+              </a:spcBef>
               <a:buNone/>
               <a:tabLst>
                 <a:tab pos="0" algn="l"/>
@@ -1676,7 +1794,7 @@
       </p:grpSpPr>
       <p:sp>
         <p:nvSpPr>
-          <p:cNvPr id="22" name="PlaceHolder 1"/>
+          <p:cNvPr id="24" name="PlaceHolder 1"/>
           <p:cNvSpPr>
             <a:spLocks noGrp="1"/>
           </p:cNvSpPr>
@@ -1687,7 +1805,7 @@
         <p:spPr>
           <a:xfrm>
             <a:off x="1154880" y="329040"/>
-            <a:ext cx="6785280" cy="443160"/>
+            <a:ext cx="6784920" cy="442800"/>
           </a:xfrm>
           <a:prstGeom prst="rect">
             <a:avLst/>
@@ -1707,6 +1825,9 @@
                 <a:spcPct val="90000"/>
               </a:lnSpc>
               <a:buNone/>
+              <a:tabLst>
+                <a:tab pos="0" algn="l"/>
+              </a:tabLst>
             </a:pPr>
             <a:r>
               <a:rPr lang="nl-BE" sz="3000" b="1" u="none" strike="noStrike">
@@ -1733,7 +1854,7 @@
       </p:sp>
       <p:sp>
         <p:nvSpPr>
-          <p:cNvPr id="23" name="PlaceHolder 2"/>
+          <p:cNvPr id="25" name="PlaceHolder 2"/>
           <p:cNvSpPr>
             <a:spLocks noGrp="1"/>
           </p:cNvSpPr>
@@ -1744,7 +1865,7 @@
         <p:spPr>
           <a:xfrm>
             <a:off x="540000" y="1800000"/>
-            <a:ext cx="7020000" cy="4376520"/>
+            <a:ext cx="7019640" cy="4376160"/>
           </a:xfrm>
           <a:prstGeom prst="rect">
             <a:avLst/>
@@ -1770,6 +1891,9 @@
                 <a:spcPts val="992"/>
               </a:spcAft>
               <a:buNone/>
+              <a:tabLst>
+                <a:tab pos="0" algn="l"/>
+              </a:tabLst>
             </a:pPr>
             <a:r>
               <a:rPr lang="nl-BE" sz="2000" b="0" u="none" strike="noStrike">
@@ -1795,7 +1919,7 @@
       </p:sp>
       <p:sp>
         <p:nvSpPr>
-          <p:cNvPr id="24" name="PlaceHolder 3"/>
+          <p:cNvPr id="26" name="PlaceHolder 3"/>
           <p:cNvSpPr>
             <a:spLocks noGrp="1"/>
           </p:cNvSpPr>
@@ -1806,7 +1930,7 @@
         <p:spPr>
           <a:xfrm>
             <a:off x="540000" y="1080000"/>
-            <a:ext cx="6785280" cy="443160"/>
+            <a:ext cx="6784920" cy="442800"/>
           </a:xfrm>
           <a:prstGeom prst="rect">
             <a:avLst/>
@@ -1826,6 +1950,9 @@
                 <a:spcPct val="90000"/>
               </a:lnSpc>
               <a:buNone/>
+              <a:tabLst>
+                <a:tab pos="0" algn="l"/>
+              </a:tabLst>
             </a:pPr>
             <a:r>
               <a:rPr lang="nl-BE" sz="3000" b="1" i="1" u="none" strike="noStrike">
@@ -1882,7 +2009,7 @@
       </p:grpSpPr>
       <p:sp>
         <p:nvSpPr>
-          <p:cNvPr id="25" name="PlaceHolder 1"/>
+          <p:cNvPr id="27" name="PlaceHolder 1"/>
           <p:cNvSpPr>
             <a:spLocks noGrp="1"/>
           </p:cNvSpPr>
@@ -1893,7 +2020,7 @@
         <p:spPr>
           <a:xfrm>
             <a:off x="1154880" y="329040"/>
-            <a:ext cx="6785280" cy="443160"/>
+            <a:ext cx="6784920" cy="442800"/>
           </a:xfrm>
           <a:prstGeom prst="rect">
             <a:avLst/>
@@ -1913,6 +2040,9 @@
                 <a:spcPct val="90000"/>
               </a:lnSpc>
               <a:buNone/>
+              <a:tabLst>
+                <a:tab pos="0" algn="l"/>
+              </a:tabLst>
             </a:pPr>
             <a:r>
               <a:rPr lang="nl-BE" sz="3000" b="1" u="none" strike="noStrike">
@@ -1939,7 +2069,7 @@
       </p:sp>
       <p:sp>
         <p:nvSpPr>
-          <p:cNvPr id="26" name="PlaceHolder 2"/>
+          <p:cNvPr id="28" name="PlaceHolder 2"/>
           <p:cNvSpPr>
             <a:spLocks noGrp="1"/>
           </p:cNvSpPr>
@@ -1950,7 +2080,7 @@
         <p:spPr>
           <a:xfrm>
             <a:off x="540000" y="1800000"/>
-            <a:ext cx="7020000" cy="4376520"/>
+            <a:ext cx="7019640" cy="4376160"/>
           </a:xfrm>
           <a:prstGeom prst="rect">
             <a:avLst/>
@@ -1976,6 +2106,9 @@
                 <a:spcPts val="992"/>
               </a:spcAft>
               <a:buNone/>
+              <a:tabLst>
+                <a:tab pos="0" algn="l"/>
+              </a:tabLst>
             </a:pPr>
             <a:r>
               <a:rPr lang="nl-BE" sz="2000" b="0" u="none" strike="noStrike">
@@ -2001,7 +2134,7 @@
       </p:sp>
       <p:sp>
         <p:nvSpPr>
-          <p:cNvPr id="27" name="PlaceHolder 3"/>
+          <p:cNvPr id="29" name="PlaceHolder 3"/>
           <p:cNvSpPr>
             <a:spLocks noGrp="1"/>
           </p:cNvSpPr>
@@ -2012,7 +2145,7 @@
         <p:spPr>
           <a:xfrm>
             <a:off x="540000" y="1080000"/>
-            <a:ext cx="6785280" cy="443160"/>
+            <a:ext cx="6784920" cy="442800"/>
           </a:xfrm>
           <a:prstGeom prst="rect">
             <a:avLst/>
@@ -2032,6 +2165,9 @@
                 <a:spcPct val="90000"/>
               </a:lnSpc>
               <a:buNone/>
+              <a:tabLst>
+                <a:tab pos="0" algn="l"/>
+              </a:tabLst>
             </a:pPr>
             <a:r>
               <a:rPr lang="nl-BE" sz="3000" b="1" i="1" u="none" strike="noStrike">
@@ -2088,7 +2224,7 @@
       </p:grpSpPr>
       <p:sp>
         <p:nvSpPr>
-          <p:cNvPr id="28" name="PlaceHolder 1"/>
+          <p:cNvPr id="30" name="PlaceHolder 1"/>
           <p:cNvSpPr>
             <a:spLocks noGrp="1"/>
           </p:cNvSpPr>
@@ -2099,7 +2235,7 @@
         <p:spPr>
           <a:xfrm>
             <a:off x="1154880" y="329040"/>
-            <a:ext cx="6785280" cy="443160"/>
+            <a:ext cx="6784920" cy="442800"/>
           </a:xfrm>
           <a:prstGeom prst="rect">
             <a:avLst/>
@@ -2119,6 +2255,9 @@
                 <a:spcPct val="90000"/>
               </a:lnSpc>
               <a:buNone/>
+              <a:tabLst>
+                <a:tab pos="0" algn="l"/>
+              </a:tabLst>
             </a:pPr>
             <a:r>
               <a:rPr lang="nl-BE" sz="3000" b="1" u="none" strike="noStrike">
@@ -2145,7 +2284,7 @@
       </p:sp>
       <p:sp>
         <p:nvSpPr>
-          <p:cNvPr id="29" name="PlaceHolder 2"/>
+          <p:cNvPr id="31" name="PlaceHolder 2"/>
           <p:cNvSpPr>
             <a:spLocks noGrp="1"/>
           </p:cNvSpPr>
@@ -2156,7 +2295,7 @@
         <p:spPr>
           <a:xfrm>
             <a:off x="540000" y="1800000"/>
-            <a:ext cx="7020000" cy="4376520"/>
+            <a:ext cx="7019640" cy="4376160"/>
           </a:xfrm>
           <a:prstGeom prst="rect">
             <a:avLst/>
@@ -2182,6 +2321,9 @@
                 <a:spcPts val="992"/>
               </a:spcAft>
               <a:buNone/>
+              <a:tabLst>
+                <a:tab pos="0" algn="l"/>
+              </a:tabLst>
             </a:pPr>
             <a:r>
               <a:rPr lang="nl-BE" sz="2000" b="0" u="none" strike="noStrike">
@@ -2207,7 +2349,7 @@
       </p:sp>
       <p:sp>
         <p:nvSpPr>
-          <p:cNvPr id="30" name="PlaceHolder 3"/>
+          <p:cNvPr id="32" name="PlaceHolder 3"/>
           <p:cNvSpPr>
             <a:spLocks noGrp="1"/>
           </p:cNvSpPr>
@@ -2218,7 +2360,7 @@
         <p:spPr>
           <a:xfrm>
             <a:off x="540000" y="1080000"/>
-            <a:ext cx="6785280" cy="443160"/>
+            <a:ext cx="6784920" cy="442800"/>
           </a:xfrm>
           <a:prstGeom prst="rect">
             <a:avLst/>
@@ -2238,6 +2380,9 @@
                 <a:spcPct val="90000"/>
               </a:lnSpc>
               <a:buNone/>
+              <a:tabLst>
+                <a:tab pos="0" algn="l"/>
+              </a:tabLst>
             </a:pPr>
             <a:r>
               <a:rPr lang="nl-BE" sz="3000" b="1" i="1" u="none" strike="noStrike">
@@ -2294,7 +2439,7 @@
       </p:grpSpPr>
       <p:sp>
         <p:nvSpPr>
-          <p:cNvPr id="31" name="PlaceHolder 1"/>
+          <p:cNvPr id="33" name="PlaceHolder 1"/>
           <p:cNvSpPr>
             <a:spLocks noGrp="1"/>
           </p:cNvSpPr>
@@ -2305,7 +2450,7 @@
         <p:spPr>
           <a:xfrm>
             <a:off x="1154880" y="329040"/>
-            <a:ext cx="6785280" cy="443160"/>
+            <a:ext cx="6784920" cy="442800"/>
           </a:xfrm>
           <a:prstGeom prst="rect">
             <a:avLst/>
@@ -2325,6 +2470,9 @@
                 <a:spcPct val="90000"/>
               </a:lnSpc>
               <a:buNone/>
+              <a:tabLst>
+                <a:tab pos="0" algn="l"/>
+              </a:tabLst>
             </a:pPr>
             <a:r>
               <a:rPr lang="nl-BE" sz="3000" b="1" u="none" strike="noStrike">
@@ -2351,7 +2499,7 @@
       </p:sp>
       <p:sp>
         <p:nvSpPr>
-          <p:cNvPr id="32" name="PlaceHolder 2"/>
+          <p:cNvPr id="34" name="PlaceHolder 2"/>
           <p:cNvSpPr>
             <a:spLocks noGrp="1"/>
           </p:cNvSpPr>
@@ -2362,7 +2510,7 @@
         <p:spPr>
           <a:xfrm>
             <a:off x="540000" y="1800000"/>
-            <a:ext cx="7020000" cy="4376520"/>
+            <a:ext cx="7019640" cy="4376160"/>
           </a:xfrm>
           <a:prstGeom prst="rect">
             <a:avLst/>
@@ -2388,6 +2536,9 @@
                 <a:spcPts val="992"/>
               </a:spcAft>
               <a:buNone/>
+              <a:tabLst>
+                <a:tab pos="0" algn="l"/>
+              </a:tabLst>
             </a:pPr>
             <a:r>
               <a:rPr lang="nl-BE" sz="2000" b="0" u="none" strike="noStrike">
@@ -2413,7 +2564,7 @@
       </p:sp>
       <p:sp>
         <p:nvSpPr>
-          <p:cNvPr id="33" name="PlaceHolder 3"/>
+          <p:cNvPr id="35" name="PlaceHolder 3"/>
           <p:cNvSpPr>
             <a:spLocks noGrp="1"/>
           </p:cNvSpPr>
@@ -2424,7 +2575,7 @@
         <p:spPr>
           <a:xfrm>
             <a:off x="540000" y="1080000"/>
-            <a:ext cx="6785280" cy="443160"/>
+            <a:ext cx="6784920" cy="442800"/>
           </a:xfrm>
           <a:prstGeom prst="rect">
             <a:avLst/>
@@ -2444,6 +2595,9 @@
                 <a:spcPct val="90000"/>
               </a:lnSpc>
               <a:buNone/>
+              <a:tabLst>
+                <a:tab pos="0" algn="l"/>
+              </a:tabLst>
             </a:pPr>
             <a:r>
               <a:rPr lang="nl-BE" sz="3000" b="1" i="1" u="none" strike="noStrike">
@@ -2500,7 +2654,7 @@
       </p:grpSpPr>
       <p:sp>
         <p:nvSpPr>
-          <p:cNvPr id="34" name="PlaceHolder 1"/>
+          <p:cNvPr id="36" name="PlaceHolder 1"/>
           <p:cNvSpPr>
             <a:spLocks noGrp="1"/>
           </p:cNvSpPr>
@@ -2511,7 +2665,7 @@
         <p:spPr>
           <a:xfrm>
             <a:off x="1154880" y="329040"/>
-            <a:ext cx="6785280" cy="443160"/>
+            <a:ext cx="6784920" cy="442800"/>
           </a:xfrm>
           <a:prstGeom prst="rect">
             <a:avLst/>
@@ -2531,6 +2685,9 @@
                 <a:spcPct val="90000"/>
               </a:lnSpc>
               <a:buNone/>
+              <a:tabLst>
+                <a:tab pos="0" algn="l"/>
+              </a:tabLst>
             </a:pPr>
             <a:r>
               <a:rPr lang="nl-BE" sz="3000" b="1" u="none" strike="noStrike">
@@ -2557,7 +2714,7 @@
       </p:sp>
       <p:sp>
         <p:nvSpPr>
-          <p:cNvPr id="35" name="PlaceHolder 2"/>
+          <p:cNvPr id="37" name="PlaceHolder 2"/>
           <p:cNvSpPr>
             <a:spLocks noGrp="1"/>
           </p:cNvSpPr>
@@ -2568,7 +2725,7 @@
         <p:spPr>
           <a:xfrm>
             <a:off x="540000" y="1800000"/>
-            <a:ext cx="7020000" cy="4376520"/>
+            <a:ext cx="7019640" cy="4376160"/>
           </a:xfrm>
           <a:prstGeom prst="rect">
             <a:avLst/>
@@ -2594,6 +2751,9 @@
                 <a:spcPts val="992"/>
               </a:spcAft>
               <a:buNone/>
+              <a:tabLst>
+                <a:tab pos="0" algn="l"/>
+              </a:tabLst>
             </a:pPr>
             <a:r>
               <a:rPr lang="nl-BE" sz="2000" b="0" u="none" strike="noStrike">
@@ -2619,7 +2779,7 @@
       </p:sp>
       <p:sp>
         <p:nvSpPr>
-          <p:cNvPr id="36" name="PlaceHolder 3"/>
+          <p:cNvPr id="38" name="PlaceHolder 3"/>
           <p:cNvSpPr>
             <a:spLocks noGrp="1"/>
           </p:cNvSpPr>
@@ -2630,7 +2790,7 @@
         <p:spPr>
           <a:xfrm>
             <a:off x="540000" y="1080000"/>
-            <a:ext cx="6785280" cy="443160"/>
+            <a:ext cx="8100000" cy="442800"/>
           </a:xfrm>
           <a:prstGeom prst="rect">
             <a:avLst/>
@@ -2650,6 +2810,9 @@
                 <a:spcPct val="90000"/>
               </a:lnSpc>
               <a:buNone/>
+              <a:tabLst>
+                <a:tab pos="0" algn="l"/>
+              </a:tabLst>
             </a:pPr>
             <a:r>
               <a:rPr lang="nl-BE" sz="3000" b="1" i="1" u="none" strike="noStrike">
@@ -2661,7 +2824,7 @@
                 <a:latin typeface="Poppins SemiBold"/>
                 <a:ea typeface="Poppins SemiBold"/>
               </a:rPr>
-              <a:t>Handleiding &amp; demonstratie</a:t>
+              <a:t>Responsive, testing  &amp; optimalisatie</a:t>
             </a:r>
             <a:endParaRPr lang="nl-BE" sz="3000" b="0" u="none" strike="noStrike">
               <a:solidFill>
@@ -2706,7 +2869,7 @@
       </p:grpSpPr>
       <p:sp>
         <p:nvSpPr>
-          <p:cNvPr id="37" name="PlaceHolder 1"/>
+          <p:cNvPr id="39" name="PlaceHolder 1"/>
           <p:cNvSpPr>
             <a:spLocks noGrp="1"/>
           </p:cNvSpPr>
@@ -2717,7 +2880,7 @@
         <p:spPr>
           <a:xfrm>
             <a:off x="1154880" y="329040"/>
-            <a:ext cx="6785280" cy="443160"/>
+            <a:ext cx="6784920" cy="442800"/>
           </a:xfrm>
           <a:prstGeom prst="rect">
             <a:avLst/>
@@ -2737,6 +2900,9 @@
                 <a:spcPct val="90000"/>
               </a:lnSpc>
               <a:buNone/>
+              <a:tabLst>
+                <a:tab pos="0" algn="l"/>
+              </a:tabLst>
             </a:pPr>
             <a:r>
               <a:rPr lang="nl-BE" sz="3000" b="1" u="none" strike="noStrike">
@@ -2763,7 +2929,7 @@
       </p:sp>
       <p:sp>
         <p:nvSpPr>
-          <p:cNvPr id="38" name="PlaceHolder 2"/>
+          <p:cNvPr id="40" name="PlaceHolder 2"/>
           <p:cNvSpPr>
             <a:spLocks noGrp="1"/>
           </p:cNvSpPr>
@@ -2774,7 +2940,7 @@
         <p:spPr>
           <a:xfrm>
             <a:off x="540000" y="1800000"/>
-            <a:ext cx="7020000" cy="4376520"/>
+            <a:ext cx="7019640" cy="4376160"/>
           </a:xfrm>
           <a:prstGeom prst="rect">
             <a:avLst/>
@@ -2800,6 +2966,9 @@
                 <a:spcPts val="992"/>
               </a:spcAft>
               <a:buNone/>
+              <a:tabLst>
+                <a:tab pos="0" algn="l"/>
+              </a:tabLst>
             </a:pPr>
             <a:r>
               <a:rPr lang="nl-BE" sz="2000" b="0" u="none" strike="noStrike">
@@ -2825,7 +2994,7 @@
       </p:sp>
       <p:sp>
         <p:nvSpPr>
-          <p:cNvPr id="39" name="PlaceHolder 3"/>
+          <p:cNvPr id="41" name="PlaceHolder 3"/>
           <p:cNvSpPr>
             <a:spLocks noGrp="1"/>
           </p:cNvSpPr>
@@ -2836,7 +3005,7 @@
         <p:spPr>
           <a:xfrm>
             <a:off x="540000" y="1080000"/>
-            <a:ext cx="6785280" cy="443160"/>
+            <a:ext cx="6784920" cy="442800"/>
           </a:xfrm>
           <a:prstGeom prst="rect">
             <a:avLst/>
@@ -2856,6 +3025,9 @@
                 <a:spcPct val="90000"/>
               </a:lnSpc>
               <a:buNone/>
+              <a:tabLst>
+                <a:tab pos="0" algn="l"/>
+              </a:tabLst>
             </a:pPr>
             <a:r>
               <a:rPr lang="nl-BE" sz="3000" b="1" i="1" u="none" strike="noStrike">
@@ -2867,7 +3039,7 @@
                 <a:latin typeface="Poppins SemiBold"/>
                 <a:ea typeface="Poppins SemiBold"/>
               </a:rPr>
-              <a:t>Reflectie</a:t>
+              <a:t>Handleiding &amp; demonstratie</a:t>
             </a:r>
             <a:endParaRPr lang="nl-BE" sz="3000" b="0" u="none" strike="noStrike">
               <a:solidFill>
@@ -2912,7 +3084,7 @@
       </p:grpSpPr>
       <p:sp>
         <p:nvSpPr>
-          <p:cNvPr id="40" name="PlaceHolder 1"/>
+          <p:cNvPr id="42" name="PlaceHolder 1"/>
           <p:cNvSpPr>
             <a:spLocks noGrp="1"/>
           </p:cNvSpPr>
@@ -2923,7 +3095,7 @@
         <p:spPr>
           <a:xfrm>
             <a:off x="1154880" y="329040"/>
-            <a:ext cx="6785280" cy="443160"/>
+            <a:ext cx="6784920" cy="442800"/>
           </a:xfrm>
           <a:prstGeom prst="rect">
             <a:avLst/>
@@ -2943,6 +3115,9 @@
                 <a:spcPct val="90000"/>
               </a:lnSpc>
               <a:buNone/>
+              <a:tabLst>
+                <a:tab pos="0" algn="l"/>
+              </a:tabLst>
             </a:pPr>
             <a:r>
               <a:rPr lang="nl-BE" sz="3000" b="1" u="none" strike="noStrike">
@@ -2969,7 +3144,7 @@
       </p:sp>
       <p:sp>
         <p:nvSpPr>
-          <p:cNvPr id="41" name="PlaceHolder 2"/>
+          <p:cNvPr id="43" name="PlaceHolder 2"/>
           <p:cNvSpPr>
             <a:spLocks noGrp="1"/>
           </p:cNvSpPr>
@@ -2980,7 +3155,7 @@
         <p:spPr>
           <a:xfrm>
             <a:off x="540000" y="1800000"/>
-            <a:ext cx="7020000" cy="4376520"/>
+            <a:ext cx="7019640" cy="4376160"/>
           </a:xfrm>
           <a:prstGeom prst="rect">
             <a:avLst/>
@@ -3006,6 +3181,9 @@
                 <a:spcPts val="992"/>
               </a:spcAft>
               <a:buNone/>
+              <a:tabLst>
+                <a:tab pos="0" algn="l"/>
+              </a:tabLst>
             </a:pPr>
             <a:r>
               <a:rPr lang="nl-BE" sz="2000" b="0" u="none" strike="noStrike">
@@ -3031,7 +3209,7 @@
       </p:sp>
       <p:sp>
         <p:nvSpPr>
-          <p:cNvPr id="42" name="PlaceHolder 3"/>
+          <p:cNvPr id="44" name="PlaceHolder 3"/>
           <p:cNvSpPr>
             <a:spLocks noGrp="1"/>
           </p:cNvSpPr>
@@ -3042,7 +3220,7 @@
         <p:spPr>
           <a:xfrm>
             <a:off x="540000" y="1080000"/>
-            <a:ext cx="6785280" cy="443160"/>
+            <a:ext cx="6784920" cy="442800"/>
           </a:xfrm>
           <a:prstGeom prst="rect">
             <a:avLst/>
@@ -3062,6 +3240,224 @@
                 <a:spcPct val="90000"/>
               </a:lnSpc>
               <a:buNone/>
+              <a:tabLst>
+                <a:tab pos="0" algn="l"/>
+              </a:tabLst>
+            </a:pPr>
+            <a:r>
+              <a:rPr lang="nl-BE" sz="3000" b="1" i="1" u="none" strike="noStrike">
+                <a:solidFill>
+                  <a:srgbClr val="86BD24"/>
+                </a:solidFill>
+                <a:effectLst/>
+                <a:uFillTx/>
+                <a:latin typeface="Poppins SemiBold"/>
+                <a:ea typeface="Poppins SemiBold"/>
+              </a:rPr>
+              <a:t>Reflectie</a:t>
+            </a:r>
+            <a:endParaRPr lang="nl-BE" sz="3000" b="0" u="none" strike="noStrike">
+              <a:solidFill>
+                <a:srgbClr val="000000"/>
+              </a:solidFill>
+              <a:effectLst/>
+              <a:uFillTx/>
+              <a:latin typeface="Arial"/>
+            </a:endParaRPr>
+          </a:p>
+        </p:txBody>
+      </p:sp>
+    </p:spTree>
+  </p:cSld>
+  <mc:AlternateContent>
+    <mc:Choice Requires="p14">
+      <p:transition spd="slow" p14:dur="2000"/>
+    </mc:Choice>
+    <mc:Fallback>
+      <p:transition spd="slow"/>
+    </mc:Fallback>
+  </mc:AlternateContent>
+</p:sld>
+</file>
+
+<file path=ppt/slides/slide9.xml><?xml version="1.0" encoding="utf-8"?>
+<p:sld xmlns:a="http://schemas.openxmlformats.org/drawingml/2006/main" xmlns:p="http://schemas.openxmlformats.org/presentationml/2006/main" xmlns:r="http://schemas.openxmlformats.org/officeDocument/2006/relationships" xmlns:p14="http://schemas.microsoft.com/office/powerpoint/2010/main" xmlns:p15="http://schemas.microsoft.com/office/powerpoint/2012/main" xmlns:mc="http://schemas.openxmlformats.org/markup-compatibility/2006">
+  <p:cSld>
+    <p:spTree>
+      <p:nvGrpSpPr>
+        <p:cNvPr id="1" name=""/>
+        <p:cNvGrpSpPr/>
+        <p:nvPr/>
+      </p:nvGrpSpPr>
+      <p:grpSpPr>
+        <a:xfrm>
+          <a:off x="0" y="0"/>
+          <a:ext cx="0" cy="0"/>
+          <a:chOff x="0" y="0"/>
+          <a:chExt cx="0" cy="0"/>
+        </a:xfrm>
+      </p:grpSpPr>
+      <p:sp>
+        <p:nvSpPr>
+          <p:cNvPr id="45" name="PlaceHolder 1"/>
+          <p:cNvSpPr>
+            <a:spLocks noGrp="1"/>
+          </p:cNvSpPr>
+          <p:nvPr>
+            <p:ph type="title"/>
+          </p:nvPr>
+        </p:nvSpPr>
+        <p:spPr>
+          <a:xfrm>
+            <a:off x="1154880" y="329040"/>
+            <a:ext cx="6784920" cy="442800"/>
+          </a:xfrm>
+          <a:prstGeom prst="rect">
+            <a:avLst/>
+          </a:prstGeom>
+          <a:noFill/>
+          <a:ln w="0">
+            <a:noFill/>
+          </a:ln>
+        </p:spPr>
+        <p:txBody>
+          <a:bodyPr lIns="91440" tIns="45720" rIns="91440" bIns="45720" anchor="t">
+            <a:noAutofit/>
+          </a:bodyPr>
+          <a:p>
+            <a:pPr indent="0" algn="l">
+              <a:lnSpc>
+                <a:spcPct val="90000"/>
+              </a:lnSpc>
+              <a:buNone/>
+              <a:tabLst>
+                <a:tab pos="0" algn="l"/>
+              </a:tabLst>
+            </a:pPr>
+            <a:r>
+              <a:rPr lang="nl-BE" sz="3000" b="1" u="none" strike="noStrike">
+                <a:solidFill>
+                  <a:schemeClr val="dk1"/>
+                </a:solidFill>
+                <a:effectLst/>
+                <a:uFillTx/>
+                <a:latin typeface="Poppins SemiBold"/>
+                <a:ea typeface="Poppins SemiBold"/>
+              </a:rPr>
+              <a:t>Titel</a:t>
+            </a:r>
+            <a:endParaRPr lang="nl-BE" sz="3000" b="0" u="none" strike="noStrike">
+              <a:solidFill>
+                <a:srgbClr val="000000"/>
+              </a:solidFill>
+              <a:effectLst/>
+              <a:uFillTx/>
+              <a:latin typeface="Arial"/>
+            </a:endParaRPr>
+          </a:p>
+        </p:txBody>
+      </p:sp>
+      <p:sp>
+        <p:nvSpPr>
+          <p:cNvPr id="46" name="PlaceHolder 2"/>
+          <p:cNvSpPr>
+            <a:spLocks noGrp="1"/>
+          </p:cNvSpPr>
+          <p:nvPr>
+            <p:ph/>
+          </p:nvPr>
+        </p:nvSpPr>
+        <p:spPr>
+          <a:xfrm>
+            <a:off x="540000" y="1800000"/>
+            <a:ext cx="7019640" cy="4376160"/>
+          </a:xfrm>
+          <a:prstGeom prst="rect">
+            <a:avLst/>
+          </a:prstGeom>
+          <a:noFill/>
+          <a:ln w="0">
+            <a:noFill/>
+          </a:ln>
+        </p:spPr>
+        <p:txBody>
+          <a:bodyPr lIns="91440" tIns="45720" rIns="91440" bIns="45720" anchor="t">
+            <a:normAutofit/>
+          </a:bodyPr>
+          <a:p>
+            <a:pPr indent="0" algn="l">
+              <a:lnSpc>
+                <a:spcPct val="90000"/>
+              </a:lnSpc>
+              <a:spcBef>
+                <a:spcPts val="1191"/>
+              </a:spcBef>
+              <a:spcAft>
+                <a:spcPts val="992"/>
+              </a:spcAft>
+              <a:buNone/>
+              <a:tabLst>
+                <a:tab pos="0" algn="l"/>
+              </a:tabLst>
+            </a:pPr>
+            <a:r>
+              <a:rPr lang="nl-BE" sz="2000" b="0" u="none" strike="noStrike">
+                <a:solidFill>
+                  <a:schemeClr val="dk1"/>
+                </a:solidFill>
+                <a:effectLst/>
+                <a:uFillTx/>
+                <a:latin typeface="Arial"/>
+              </a:rPr>
+              <a:t>Lorem ipsum dolor sit amet, consectetur adipiscing elit. Proin malesuada tempor mi sit amet cursus.</a:t>
+            </a:r>
+            <a:endParaRPr lang="nl-BE" sz="2000" b="0" u="none" strike="noStrike">
+              <a:solidFill>
+                <a:srgbClr val="000000"/>
+              </a:solidFill>
+              <a:effectLst/>
+              <a:uFillTx/>
+              <a:latin typeface="Arial"/>
+            </a:endParaRPr>
+          </a:p>
+        </p:txBody>
+      </p:sp>
+      <p:sp>
+        <p:nvSpPr>
+          <p:cNvPr id="47" name="PlaceHolder 3"/>
+          <p:cNvSpPr>
+            <a:spLocks noGrp="1"/>
+          </p:cNvSpPr>
+          <p:nvPr>
+            <p:ph type="title"/>
+          </p:nvPr>
+        </p:nvSpPr>
+        <p:spPr>
+          <a:xfrm>
+            <a:off x="540000" y="1080000"/>
+            <a:ext cx="6784920" cy="442800"/>
+          </a:xfrm>
+          <a:prstGeom prst="rect">
+            <a:avLst/>
+          </a:prstGeom>
+          <a:noFill/>
+          <a:ln w="0">
+            <a:noFill/>
+          </a:ln>
+        </p:spPr>
+        <p:txBody>
+          <a:bodyPr lIns="91440" tIns="45720" rIns="91440" bIns="45720" anchor="t">
+            <a:noAutofit/>
+          </a:bodyPr>
+          <a:p>
+            <a:pPr indent="0" algn="l">
+              <a:lnSpc>
+                <a:spcPct val="90000"/>
+              </a:lnSpc>
+              <a:buNone/>
+              <a:tabLst>
+                <a:tab pos="0" algn="l"/>
+              </a:tabLst>
             </a:pPr>
             <a:r>
               <a:rPr lang="nl-BE" sz="3000" b="1" i="1" u="none" strike="noStrike">
